--- a/docs/presentaciones/classes/clase-136-forecasting-de-series-con-rnn-presentacion.pptx
+++ b/docs/presentaciones/classes/clase-136-forecasting-de-series-con-rnn-presentacion.pptx
@@ -4888,7 +4888,311 @@
                 </a:solidFill>
                 <a:latin typeface="Courier New"/>
               </a:rPr>
-              <a:t># Imports y configuración inicial</a:t>
+              <a:t>import numpy as np</a:t>
+            </a:r>
+          </a:p>
+          <a:p>
+            <a:pPr>
+              <a:defRPr sz="1200" b="0">
+                <a:solidFill>
+                  <a:srgbClr val="F8FAFC"/>
+                </a:solidFill>
+                <a:latin typeface="Courier New"/>
+              </a:defRPr>
+            </a:pPr>
+            <a:r>
+              <a:rPr sz="1200" b="0">
+                <a:solidFill>
+                  <a:srgbClr val="F8FAFC"/>
+                </a:solidFill>
+                <a:latin typeface="Courier New"/>
+              </a:rPr>
+              <a:t>from tensorflow import keras</a:t>
+            </a:r>
+          </a:p>
+          <a:p>
+            <a:pPr>
+              <a:defRPr sz="1200" b="0">
+                <a:solidFill>
+                  <a:srgbClr val="F8FAFC"/>
+                </a:solidFill>
+                <a:latin typeface="Courier New"/>
+              </a:defRPr>
+            </a:pPr>
+            <a:r>
+              <a:rPr sz="1200" b="0">
+                <a:solidFill>
+                  <a:srgbClr val="F8FAFC"/>
+                </a:solidFill>
+                <a:latin typeface="Courier New"/>
+              </a:rPr>
+              <a:t>from tensorflow.keras import layers</a:t>
+            </a:r>
+          </a:p>
+          <a:p>
+            <a:pPr>
+              <a:defRPr sz="1200" b="0">
+                <a:solidFill>
+                  <a:srgbClr val="F8FAFC"/>
+                </a:solidFill>
+                <a:latin typeface="Courier New"/>
+              </a:defRPr>
+            </a:pPr>
+            <a:r>
+              <a:rPr sz="1200" b="0">
+                <a:solidFill>
+                  <a:srgbClr val="F8FAFC"/>
+                </a:solidFill>
+                <a:latin typeface="Courier New"/>
+              </a:rPr>
+              <a:t>keras.utils.set_random_seed(42)</a:t>
+            </a:r>
+          </a:p>
+          <a:p>
+            <a:pPr>
+              <a:defRPr sz="1200" b="0">
+                <a:solidFill>
+                  <a:srgbClr val="F8FAFC"/>
+                </a:solidFill>
+                <a:latin typeface="Courier New"/>
+              </a:defRPr>
+            </a:pPr>
+            <a:r>
+              <a:rPr sz="1200" b="0">
+                <a:solidFill>
+                  <a:srgbClr val="F8FAFC"/>
+                </a:solidFill>
+                <a:latin typeface="Courier New"/>
+              </a:rPr>
+              <a:t>r = np.random.default_rng(42)</a:t>
+            </a:r>
+          </a:p>
+          <a:p>
+            <a:pPr>
+              <a:defRPr sz="1200" b="0">
+                <a:solidFill>
+                  <a:srgbClr val="F8FAFC"/>
+                </a:solidFill>
+                <a:latin typeface="Courier New"/>
+              </a:defRPr>
+            </a:pPr>
+            <a:r>
+              <a:rPr sz="1200" b="0">
+                <a:solidFill>
+                  <a:srgbClr val="F8FAFC"/>
+                </a:solidFill>
+                <a:latin typeface="Courier New"/>
+              </a:rPr>
+              <a:t>t = np.arange(2000)</a:t>
+            </a:r>
+          </a:p>
+          <a:p>
+            <a:pPr>
+              <a:defRPr sz="1200" b="0">
+                <a:solidFill>
+                  <a:srgbClr val="F8FAFC"/>
+                </a:solidFill>
+                <a:latin typeface="Courier New"/>
+              </a:defRPr>
+            </a:pPr>
+            <a:r>
+              <a:rPr sz="1200" b="0">
+                <a:solidFill>
+                  <a:srgbClr val="F8FAFC"/>
+                </a:solidFill>
+                <a:latin typeface="Courier New"/>
+              </a:rPr>
+              <a:t>serie = (np.sin(2 * np.pi * t / 50) + 0.3 * np.sin(2 * np.pi * t / 13)</a:t>
+            </a:r>
+          </a:p>
+          <a:p>
+            <a:pPr>
+              <a:defRPr sz="1200" b="0">
+                <a:solidFill>
+                  <a:srgbClr val="F8FAFC"/>
+                </a:solidFill>
+                <a:latin typeface="Courier New"/>
+              </a:defRPr>
+            </a:pPr>
+            <a:r>
+              <a:rPr sz="1200" b="0">
+                <a:solidFill>
+                  <a:srgbClr val="F8FAFC"/>
+                </a:solidFill>
+                <a:latin typeface="Courier New"/>
+              </a:rPr>
+              <a:t>         + r.normal(0, 0.1, t.size)).astype("float32")</a:t>
+            </a:r>
+          </a:p>
+          <a:p>
+            <a:pPr>
+              <a:defRPr sz="1200" b="0">
+                <a:solidFill>
+                  <a:srgbClr val="F8FAFC"/>
+                </a:solidFill>
+                <a:latin typeface="Courier New"/>
+              </a:defRPr>
+            </a:pPr>
+            <a:r>
+              <a:rPr sz="1200" b="0">
+                <a:solidFill>
+                  <a:srgbClr val="F8FAFC"/>
+                </a:solidFill>
+                <a:latin typeface="Courier New"/>
+              </a:rPr>
+              <a:t> </a:t>
+            </a:r>
+          </a:p>
+          <a:p>
+            <a:pPr>
+              <a:defRPr sz="1200" b="0">
+                <a:solidFill>
+                  <a:srgbClr val="F8FAFC"/>
+                </a:solidFill>
+                <a:latin typeface="Courier New"/>
+              </a:defRPr>
+            </a:pPr>
+            <a:r>
+              <a:rPr sz="1200" b="0">
+                <a:solidFill>
+                  <a:srgbClr val="F8FAFC"/>
+                </a:solidFill>
+                <a:latin typeface="Courier New"/>
+              </a:rPr>
+              <a:t>n = len(serie)</a:t>
+            </a:r>
+          </a:p>
+          <a:p>
+            <a:pPr>
+              <a:defRPr sz="1200" b="0">
+                <a:solidFill>
+                  <a:srgbClr val="F8FAFC"/>
+                </a:solidFill>
+                <a:latin typeface="Courier New"/>
+              </a:defRPr>
+            </a:pPr>
+            <a:r>
+              <a:rPr sz="1200" b="0">
+                <a:solidFill>
+                  <a:srgbClr val="F8FAFC"/>
+                </a:solidFill>
+                <a:latin typeface="Courier New"/>
+              </a:rPr>
+              <a:t>tr_end, val_end = int(n * 0.7), int(n * 0.85)</a:t>
+            </a:r>
+          </a:p>
+          <a:p>
+            <a:pPr>
+              <a:defRPr sz="1200" b="0">
+                <a:solidFill>
+                  <a:srgbClr val="F8FAFC"/>
+                </a:solidFill>
+                <a:latin typeface="Courier New"/>
+              </a:defRPr>
+            </a:pPr>
+            <a:r>
+              <a:rPr sz="1200" b="0">
+                <a:solidFill>
+                  <a:srgbClr val="F8FAFC"/>
+                </a:solidFill>
+                <a:latin typeface="Courier New"/>
+              </a:rPr>
+              <a:t>train, val, test = serie[:tr_end], serie[tr_end:val_end], serie[val_end:]  # 70/15/15 temporal</a:t>
+            </a:r>
+          </a:p>
+          <a:p>
+            <a:pPr>
+              <a:defRPr sz="1200" b="0">
+                <a:solidFill>
+                  <a:srgbClr val="F8FAFC"/>
+                </a:solidFill>
+                <a:latin typeface="Courier New"/>
+              </a:defRPr>
+            </a:pPr>
+            <a:r>
+              <a:rPr sz="1200" b="0">
+                <a:solidFill>
+                  <a:srgbClr val="F8FAFC"/>
+                </a:solidFill>
+                <a:latin typeface="Courier New"/>
+              </a:rPr>
+              <a:t>mu, sigma = train.mean(), train.std()          # stats SOLO de train (sin leakage)</a:t>
+            </a:r>
+          </a:p>
+          <a:p>
+            <a:pPr>
+              <a:defRPr sz="1200" b="0">
+                <a:solidFill>
+                  <a:srgbClr val="F8FAFC"/>
+                </a:solidFill>
+                <a:latin typeface="Courier New"/>
+              </a:defRPr>
+            </a:pPr>
+            <a:r>
+              <a:rPr sz="1200" b="0">
+                <a:solidFill>
+                  <a:srgbClr val="F8FAFC"/>
+                </a:solidFill>
+                <a:latin typeface="Courier New"/>
+              </a:rPr>
+              <a:t>train_n = (train - mu) / sigma</a:t>
+            </a:r>
+          </a:p>
+          <a:p>
+            <a:pPr>
+              <a:defRPr sz="1200" b="0">
+                <a:solidFill>
+                  <a:srgbClr val="F8FAFC"/>
+                </a:solidFill>
+                <a:latin typeface="Courier New"/>
+              </a:defRPr>
+            </a:pPr>
+            <a:r>
+              <a:rPr sz="1200" b="0">
+                <a:solidFill>
+                  <a:srgbClr val="F8FAFC"/>
+                </a:solidFill>
+                <a:latin typeface="Courier New"/>
+              </a:rPr>
+              <a:t>val_n = (val - mu) / sigma</a:t>
+            </a:r>
+          </a:p>
+          <a:p>
+            <a:pPr>
+              <a:defRPr sz="1200" b="0">
+                <a:solidFill>
+                  <a:srgbClr val="F8FAFC"/>
+                </a:solidFill>
+                <a:latin typeface="Courier New"/>
+              </a:defRPr>
+            </a:pPr>
+            <a:r>
+              <a:rPr sz="1200" b="0">
+                <a:solidFill>
+                  <a:srgbClr val="F8FAFC"/>
+                </a:solidFill>
+                <a:latin typeface="Courier New"/>
+              </a:rPr>
+              <a:t>test_n = (test - mu) / sigma</a:t>
+            </a:r>
+          </a:p>
+          <a:p>
+            <a:pPr>
+              <a:defRPr sz="1200" b="0">
+                <a:solidFill>
+                  <a:srgbClr val="F8FAFC"/>
+                </a:solidFill>
+                <a:latin typeface="Courier New"/>
+              </a:defRPr>
+            </a:pPr>
+            <a:r>
+              <a:rPr sz="1200" b="0">
+                <a:solidFill>
+                  <a:srgbClr val="F8FAFC"/>
+                </a:solidFill>
+                <a:latin typeface="Courier New"/>
+              </a:rPr>
+              <a:t>print("tamaños:", train.shape, val.shape, test.shape)</a:t>
             </a:r>
           </a:p>
         </p:txBody>

--- a/docs/presentaciones/classes/clase-136-forecasting-de-series-con-rnn-presentacion.pptx
+++ b/docs/presentaciones/classes/clase-136-forecasting-de-series-con-rnn-presentacion.pptx
@@ -3272,7 +3272,7 @@
                 </a:solidFill>
                 <a:latin typeface="Segoe UI"/>
               </a:rPr>
-              <a:t>Parte: 2 — Deep Learning · Fuente: Géron, cap. 15 § Forecasting a Time Series.  Duración estimada: 80 min.</a:t>
+              <a:t>Parte: 2 — Deep Learning · Fuente: Géron, cap. 15 § Forecasting a Time Series.  Duración estimada: 80 min. · Nivel: Avanzado</a:t>
             </a:r>
           </a:p>
         </p:txBody>
@@ -3581,7 +3581,7 @@
                 </a:solidFill>
                 <a:latin typeface="Segoe UI"/>
               </a:rPr>
-              <a:t>Parte: 2 — Deep Learning · Fuente: Géron, cap. 15 § Forecasting a Time Series.  Duración estimada: 80 min.</a:t>
+              <a:t>Parte: 2 — Deep Learning · Fuente: Géron, cap. 15 § Forecasting a Time Series.  Duración estimada: 80 min. · Nivel: Avanzado</a:t>
             </a:r>
           </a:p>
         </p:txBody>
